--- a/Vinage-Zakelijk-Okhuysen.pptx
+++ b/Vinage-Zakelijk-Okhuysen.pptx
@@ -2874,17 +2874,17 @@
               <a:buNone/>
             </a:pPr>
             <a:r>
-              <a:rPr lang="en-US" sz="2800" dirty="0">
-                <a:solidFill>
-                  <a:srgbClr val="000000"/>
-                </a:solidFill>
-                <a:latin typeface="Calibri" pitchFamily="34" charset="0"/>
-                <a:ea typeface="Calibri" pitchFamily="34" charset="-122"/>
-                <a:cs typeface="Calibri" pitchFamily="34" charset="-120"/>
-              </a:rPr>
-              <a:t>🏪</a:t>
-            </a:r>
-            <a:endParaRPr lang="en-US" sz="2800" dirty="0"/>
+              <a:rPr lang="en-US" sz="1600" b="1" dirty="0">
+                <a:solidFill>
+                  <a:srgbClr val="FFFFFF"/>
+                </a:solidFill>
+                <a:latin typeface="Cambria" pitchFamily="34" charset="0"/>
+                <a:ea typeface="Cambria" pitchFamily="34" charset="-122"/>
+                <a:cs typeface="Cambria" pitchFamily="34" charset="-120"/>
+              </a:rPr>
+              <a:t>RET</a:t>
+            </a:r>
+            <a:endParaRPr lang="en-US" sz="1600" dirty="0"/>
           </a:p>
         </p:txBody>
       </p:sp>
@@ -3048,17 +3048,17 @@
               <a:buNone/>
             </a:pPr>
             <a:r>
-              <a:rPr lang="en-US" sz="2800" dirty="0">
-                <a:solidFill>
-                  <a:srgbClr val="000000"/>
-                </a:solidFill>
-                <a:latin typeface="Calibri" pitchFamily="34" charset="0"/>
-                <a:ea typeface="Calibri" pitchFamily="34" charset="-122"/>
-                <a:cs typeface="Calibri" pitchFamily="34" charset="-120"/>
-              </a:rPr>
-              <a:t>📣</a:t>
-            </a:r>
-            <a:endParaRPr lang="en-US" sz="2800" dirty="0"/>
+              <a:rPr lang="en-US" sz="1600" b="1" dirty="0">
+                <a:solidFill>
+                  <a:srgbClr val="FFFFFF"/>
+                </a:solidFill>
+                <a:latin typeface="Cambria" pitchFamily="34" charset="0"/>
+                <a:ea typeface="Cambria" pitchFamily="34" charset="-122"/>
+                <a:cs typeface="Cambria" pitchFamily="34" charset="-120"/>
+              </a:rPr>
+              <a:t>MKT</a:t>
+            </a:r>
+            <a:endParaRPr lang="en-US" sz="1600" dirty="0"/>
           </a:p>
         </p:txBody>
       </p:sp>
@@ -3222,17 +3222,17 @@
               <a:buNone/>
             </a:pPr>
             <a:r>
-              <a:rPr lang="en-US" sz="2800" dirty="0">
-                <a:solidFill>
-                  <a:srgbClr val="000000"/>
-                </a:solidFill>
-                <a:latin typeface="Calibri" pitchFamily="34" charset="0"/>
-                <a:ea typeface="Calibri" pitchFamily="34" charset="-122"/>
-                <a:cs typeface="Calibri" pitchFamily="34" charset="-120"/>
-              </a:rPr>
-              <a:t>💼</a:t>
-            </a:r>
-            <a:endParaRPr lang="en-US" sz="2800" dirty="0"/>
+              <a:rPr lang="en-US" sz="1600" b="1" dirty="0">
+                <a:solidFill>
+                  <a:srgbClr val="FFFFFF"/>
+                </a:solidFill>
+                <a:latin typeface="Cambria" pitchFamily="34" charset="0"/>
+                <a:ea typeface="Cambria" pitchFamily="34" charset="-122"/>
+                <a:cs typeface="Cambria" pitchFamily="34" charset="-120"/>
+              </a:rPr>
+              <a:t>WL</a:t>
+            </a:r>
+            <a:endParaRPr lang="en-US" sz="1600" dirty="0"/>
           </a:p>
         </p:txBody>
       </p:sp>
@@ -4949,17 +4949,17 @@
               <a:buNone/>
             </a:pPr>
             <a:r>
-              <a:rPr lang="en-US" sz="2200" dirty="0">
-                <a:solidFill>
-                  <a:srgbClr val="000000"/>
-                </a:solidFill>
-                <a:latin typeface="Calibri" pitchFamily="34" charset="0"/>
-                <a:ea typeface="Calibri" pitchFamily="34" charset="-122"/>
-                <a:cs typeface="Calibri" pitchFamily="34" charset="-120"/>
-              </a:rPr>
-              <a:t>📷</a:t>
-            </a:r>
-            <a:endParaRPr lang="en-US" sz="2200" dirty="0"/>
+              <a:rPr lang="en-US" sz="1400" b="1" dirty="0">
+                <a:solidFill>
+                  <a:srgbClr val="FFFFFF"/>
+                </a:solidFill>
+                <a:latin typeface="Cambria" pitchFamily="34" charset="0"/>
+                <a:ea typeface="Cambria" pitchFamily="34" charset="-122"/>
+                <a:cs typeface="Cambria" pitchFamily="34" charset="-120"/>
+              </a:rPr>
+              <a:t>SCAN</a:t>
+            </a:r>
+            <a:endParaRPr lang="en-US" sz="1400" dirty="0"/>
           </a:p>
         </p:txBody>
       </p:sp>
@@ -5140,17 +5140,17 @@
               <a:buNone/>
             </a:pPr>
             <a:r>
-              <a:rPr lang="en-US" sz="2200" dirty="0">
-                <a:solidFill>
-                  <a:srgbClr val="000000"/>
-                </a:solidFill>
-                <a:latin typeface="Calibri" pitchFamily="34" charset="0"/>
-                <a:ea typeface="Calibri" pitchFamily="34" charset="-122"/>
-                <a:cs typeface="Calibri" pitchFamily="34" charset="-120"/>
-              </a:rPr>
-              <a:t>🍷</a:t>
-            </a:r>
-            <a:endParaRPr lang="en-US" sz="2200" dirty="0"/>
+              <a:rPr lang="en-US" sz="1400" b="1" dirty="0">
+                <a:solidFill>
+                  <a:srgbClr val="FFFFFF"/>
+                </a:solidFill>
+                <a:latin typeface="Cambria" pitchFamily="34" charset="0"/>
+                <a:ea typeface="Cambria" pitchFamily="34" charset="-122"/>
+                <a:cs typeface="Cambria" pitchFamily="34" charset="-120"/>
+              </a:rPr>
+              <a:t>CEL</a:t>
+            </a:r>
+            <a:endParaRPr lang="en-US" sz="1400" dirty="0"/>
           </a:p>
         </p:txBody>
       </p:sp>
@@ -5331,17 +5331,17 @@
               <a:buNone/>
             </a:pPr>
             <a:r>
-              <a:rPr lang="en-US" sz="2200" dirty="0">
-                <a:solidFill>
-                  <a:srgbClr val="000000"/>
-                </a:solidFill>
-                <a:latin typeface="Calibri" pitchFamily="34" charset="0"/>
-                <a:ea typeface="Calibri" pitchFamily="34" charset="-122"/>
-                <a:cs typeface="Calibri" pitchFamily="34" charset="-120"/>
-              </a:rPr>
-              <a:t>🤝</a:t>
-            </a:r>
-            <a:endParaRPr lang="en-US" sz="2200" dirty="0"/>
+              <a:rPr lang="en-US" sz="1400" b="1" dirty="0">
+                <a:solidFill>
+                  <a:srgbClr val="FFFFFF"/>
+                </a:solidFill>
+                <a:latin typeface="Cambria" pitchFamily="34" charset="0"/>
+                <a:ea typeface="Cambria" pitchFamily="34" charset="-122"/>
+                <a:cs typeface="Cambria" pitchFamily="34" charset="-120"/>
+              </a:rPr>
+              <a:t>DEEL</a:t>
+            </a:r>
+            <a:endParaRPr lang="en-US" sz="1400" dirty="0"/>
           </a:p>
         </p:txBody>
       </p:sp>
@@ -5522,17 +5522,17 @@
               <a:buNone/>
             </a:pPr>
             <a:r>
-              <a:rPr lang="en-US" sz="2200" dirty="0">
-                <a:solidFill>
-                  <a:srgbClr val="000000"/>
-                </a:solidFill>
-                <a:latin typeface="Calibri" pitchFamily="34" charset="0"/>
-                <a:ea typeface="Calibri" pitchFamily="34" charset="-122"/>
-                <a:cs typeface="Calibri" pitchFamily="34" charset="-120"/>
-              </a:rPr>
-              <a:t>🍽️</a:t>
-            </a:r>
-            <a:endParaRPr lang="en-US" sz="2200" dirty="0"/>
+              <a:rPr lang="en-US" sz="1400" b="1" dirty="0">
+                <a:solidFill>
+                  <a:srgbClr val="FFFFFF"/>
+                </a:solidFill>
+                <a:latin typeface="Cambria" pitchFamily="34" charset="0"/>
+                <a:ea typeface="Cambria" pitchFamily="34" charset="-122"/>
+                <a:cs typeface="Cambria" pitchFamily="34" charset="-120"/>
+              </a:rPr>
+              <a:t>AI</a:t>
+            </a:r>
+            <a:endParaRPr lang="en-US" sz="1400" dirty="0"/>
           </a:p>
         </p:txBody>
       </p:sp>
@@ -7164,17 +7164,17 @@
               <a:buNone/>
             </a:pPr>
             <a:r>
-              <a:rPr lang="en-US" sz="6400" dirty="0">
-                <a:solidFill>
-                  <a:srgbClr val="000000"/>
-                </a:solidFill>
-                <a:latin typeface="Calibri" pitchFamily="34" charset="0"/>
-                <a:ea typeface="Calibri" pitchFamily="34" charset="-122"/>
-                <a:cs typeface="Calibri" pitchFamily="34" charset="-120"/>
-              </a:rPr>
-              <a:t>👥</a:t>
-            </a:r>
-            <a:endParaRPr lang="en-US" sz="6400" dirty="0"/>
+              <a:rPr lang="en-US" sz="3600" b="1" dirty="0">
+                <a:solidFill>
+                  <a:srgbClr val="FFFFFF"/>
+                </a:solidFill>
+                <a:latin typeface="Cambria" pitchFamily="34" charset="0"/>
+                <a:ea typeface="Cambria" pitchFamily="34" charset="-122"/>
+                <a:cs typeface="Cambria" pitchFamily="34" charset="-120"/>
+              </a:rPr>
+              <a:t>DEEL</a:t>
+            </a:r>
+            <a:endParaRPr lang="en-US" sz="3600" dirty="0"/>
           </a:p>
         </p:txBody>
       </p:sp>
@@ -8843,7 +8843,7 @@
               <a:buNone/>
             </a:pPr>
             <a:r>
-              <a:rPr lang="en-US" sz="1400" b="1" dirty="0">
+              <a:rPr lang="en-US" sz="1000" b="1" dirty="0">
                 <a:solidFill>
                   <a:srgbClr val="FFFFFF"/>
                 </a:solidFill>
@@ -8851,9 +8851,9 @@
                 <a:ea typeface="Calibri" pitchFamily="34" charset="-122"/>
                 <a:cs typeface="Calibri" pitchFamily="34" charset="-120"/>
               </a:rPr>
-              <a:t>✓</a:t>
-            </a:r>
-            <a:endParaRPr lang="en-US" sz="1400" dirty="0"/>
+              <a:t>OK</a:t>
+            </a:r>
+            <a:endParaRPr lang="en-US" sz="1000" dirty="0"/>
           </a:p>
         </p:txBody>
       </p:sp>
@@ -8985,7 +8985,7 @@
               <a:buNone/>
             </a:pPr>
             <a:r>
-              <a:rPr lang="en-US" sz="1400" b="1" dirty="0">
+              <a:rPr lang="en-US" sz="1000" b="1" dirty="0">
                 <a:solidFill>
                   <a:srgbClr val="FFFFFF"/>
                 </a:solidFill>
@@ -8993,9 +8993,9 @@
                 <a:ea typeface="Calibri" pitchFamily="34" charset="-122"/>
                 <a:cs typeface="Calibri" pitchFamily="34" charset="-120"/>
               </a:rPr>
-              <a:t>✓</a:t>
-            </a:r>
-            <a:endParaRPr lang="en-US" sz="1400" dirty="0"/>
+              <a:t>OK</a:t>
+            </a:r>
+            <a:endParaRPr lang="en-US" sz="1000" dirty="0"/>
           </a:p>
         </p:txBody>
       </p:sp>
@@ -9127,7 +9127,7 @@
               <a:buNone/>
             </a:pPr>
             <a:r>
-              <a:rPr lang="en-US" sz="1400" b="1" dirty="0">
+              <a:rPr lang="en-US" sz="1000" b="1" dirty="0">
                 <a:solidFill>
                   <a:srgbClr val="FFFFFF"/>
                 </a:solidFill>
@@ -9135,9 +9135,9 @@
                 <a:ea typeface="Calibri" pitchFamily="34" charset="-122"/>
                 <a:cs typeface="Calibri" pitchFamily="34" charset="-120"/>
               </a:rPr>
-              <a:t>✓</a:t>
-            </a:r>
-            <a:endParaRPr lang="en-US" sz="1400" dirty="0"/>
+              <a:t>OK</a:t>
+            </a:r>
+            <a:endParaRPr lang="en-US" sz="1000" dirty="0"/>
           </a:p>
         </p:txBody>
       </p:sp>
@@ -9269,7 +9269,7 @@
               <a:buNone/>
             </a:pPr>
             <a:r>
-              <a:rPr lang="en-US" sz="1400" b="1" dirty="0">
+              <a:rPr lang="en-US" sz="1000" b="1" dirty="0">
                 <a:solidFill>
                   <a:srgbClr val="FFFFFF"/>
                 </a:solidFill>
@@ -9277,9 +9277,9 @@
                 <a:ea typeface="Calibri" pitchFamily="34" charset="-122"/>
                 <a:cs typeface="Calibri" pitchFamily="34" charset="-120"/>
               </a:rPr>
-              <a:t>✓</a:t>
-            </a:r>
-            <a:endParaRPr lang="en-US" sz="1400" dirty="0"/>
+              <a:t>OK</a:t>
+            </a:r>
+            <a:endParaRPr lang="en-US" sz="1000" dirty="0"/>
           </a:p>
         </p:txBody>
       </p:sp>
@@ -9411,7 +9411,7 @@
               <a:buNone/>
             </a:pPr>
             <a:r>
-              <a:rPr lang="en-US" sz="1400" b="1" dirty="0">
+              <a:rPr lang="en-US" sz="1000" b="1" dirty="0">
                 <a:solidFill>
                   <a:srgbClr val="FFFFFF"/>
                 </a:solidFill>
@@ -9419,9 +9419,9 @@
                 <a:ea typeface="Calibri" pitchFamily="34" charset="-122"/>
                 <a:cs typeface="Calibri" pitchFamily="34" charset="-120"/>
               </a:rPr>
-              <a:t>✓</a:t>
-            </a:r>
-            <a:endParaRPr lang="en-US" sz="1400" dirty="0"/>
+              <a:t>OK</a:t>
+            </a:r>
+            <a:endParaRPr lang="en-US" sz="1000" dirty="0"/>
           </a:p>
         </p:txBody>
       </p:sp>
@@ -9553,7 +9553,7 @@
               <a:buNone/>
             </a:pPr>
             <a:r>
-              <a:rPr lang="en-US" sz="1400" b="1" dirty="0">
+              <a:rPr lang="en-US" sz="1000" b="1" dirty="0">
                 <a:solidFill>
                   <a:srgbClr val="FFFFFF"/>
                 </a:solidFill>
@@ -9561,9 +9561,9 @@
                 <a:ea typeface="Calibri" pitchFamily="34" charset="-122"/>
                 <a:cs typeface="Calibri" pitchFamily="34" charset="-120"/>
               </a:rPr>
-              <a:t>✓</a:t>
-            </a:r>
-            <a:endParaRPr lang="en-US" sz="1400" dirty="0"/>
+              <a:t>OK</a:t>
+            </a:r>
+            <a:endParaRPr lang="en-US" sz="1000" dirty="0"/>
           </a:p>
         </p:txBody>
       </p:sp>
